--- a/q3_week3/第四回レポート　宮澤研究室発表.pptx
+++ b/q3_week3/第四回レポート　宮澤研究室発表.pptx
@@ -109,6 +109,11 @@
       </a:defRPr>
     </a:lvl9pPr>
   </p:defaultTextStyle>
+  <p:extLst>
+    <p:ext uri="{EFAFB233-063F-42B5-8137-9DF3F51BA10A}">
+      <p15:sldGuideLst xmlns:p15="http://schemas.microsoft.com/office/powerpoint/2012/main"/>
+    </p:ext>
+  </p:extLst>
 </p:presentation>
 </file>
 
@@ -13763,39 +13768,43 @@
           <a:lstStyle/>
           <a:p>
             <a:r>
-              <a:rPr lang="en-US" altLang="ja-JP" sz="2000"/>
+              <a:rPr lang="en-US" altLang="ja-JP" sz="2000" dirty="0"/>
               <a:t>Docker</a:t>
             </a:r>
             <a:r>
-              <a:rPr lang="ja-JP" altLang="en-US" sz="2000"/>
+              <a:rPr lang="ja-JP" altLang="en-US" sz="2000" dirty="0"/>
               <a:t>は、アプリケーションを軽量なコンテナとしてパッケージ化し、どの環境でも同じように動作させるためであり</a:t>
             </a:r>
             <a:r>
-              <a:rPr lang="en-US" altLang="ja-JP" sz="2000"/>
+              <a:rPr lang="en-US" altLang="ja-JP" sz="2000" dirty="0"/>
               <a:t>Docker</a:t>
             </a:r>
             <a:r>
-              <a:rPr lang="ja-JP" altLang="en-US" sz="2000"/>
+              <a:rPr lang="ja-JP" altLang="en-US" sz="2000" dirty="0"/>
               <a:t>はコンテナの作成と実行に特化。</a:t>
             </a:r>
-            <a:endParaRPr lang="en-US" altLang="ja-JP" sz="2000"/>
+            <a:endParaRPr lang="en-US" altLang="ja-JP" sz="2000" dirty="0"/>
           </a:p>
           <a:p>
-            <a:endParaRPr kumimoji="1" lang="en-US" altLang="ja-JP" sz="2000"/>
+            <a:endParaRPr kumimoji="1" lang="en-US" altLang="ja-JP" sz="2000" dirty="0"/>
           </a:p>
           <a:p>
             <a:r>
-              <a:rPr lang="en-US" altLang="ja-JP" sz="2000"/>
+              <a:rPr lang="en-US" altLang="ja-JP" sz="2000" dirty="0"/>
               <a:t>Kubernetes</a:t>
             </a:r>
             <a:r>
               <a:rPr lang="ja-JP" altLang="en-US" sz="2000"/>
-              <a:t>はコンテナおーけであり、複数のコンテナを効率的に管理するために使用されコンテナを大規模に管理するためのツールである。</a:t>
-            </a:r>
-            <a:endParaRPr lang="en-US" altLang="ja-JP" sz="2000"/>
+              <a:t>はコンテナオーケストレーションツールで</a:t>
+            </a:r>
+            <a:r>
+              <a:rPr lang="ja-JP" altLang="en-US" sz="2000" dirty="0"/>
+              <a:t>あり、複数のコンテナを効率的に管理するために使用されコンテナを大規模に管理するためのツールである。</a:t>
+            </a:r>
+            <a:endParaRPr lang="en-US" altLang="ja-JP" sz="2000" dirty="0"/>
           </a:p>
           <a:p>
-            <a:endParaRPr kumimoji="1" lang="ja-JP" altLang="en-US" sz="2000"/>
+            <a:endParaRPr kumimoji="1" lang="ja-JP" altLang="en-US" sz="2000" dirty="0"/>
           </a:p>
         </p:txBody>
       </p:sp>
